--- a/EPS_I/ro/fisiere/LP02.pptx
+++ b/EPS_I/ro/fisiere/LP02.pptx
@@ -12792,7 +12792,7 @@
                 <a:ea typeface="Palatino Linotype" pitchFamily="34" charset="-122"/>
                 <a:cs typeface="Palatino Linotype" pitchFamily="34" charset="-120"/>
               </a:rPr>
-              <a:t>La ședința lunară, șeful laboratorului arată că tomografiile de cap la copiii cu lovituri ușoare au crescut față de anul trecut.</a:t>
+              <a:t>La ședința lunară, șeful laboratorului arată că examenele prin tomografie computerizată (CT) ale capului la copiii cu lovituri ușoare au crescut față de anul trecut.</a:t>
             </a:r>
             <a:endParaRPr lang="en-US" sz="1400" dirty="0"/>
           </a:p>
@@ -13586,7 +13586,7 @@
                 <a:ea typeface="Palatino Linotype" pitchFamily="34" charset="-122"/>
                 <a:cs typeface="Palatino Linotype" pitchFamily="34" charset="-120"/>
               </a:rPr>
-              <a:t>Ce va simți băiatul în timpul tomografiei?</a:t>
+              <a:t>Ce va simți băiatul în timpul examenului CT?</a:t>
             </a:r>
             <a:endParaRPr lang="en-US" sz="1600" dirty="0"/>
           </a:p>
@@ -13755,7 +13755,7 @@
                 <a:ea typeface="Palatino Linotype" pitchFamily="34" charset="-122"/>
                 <a:cs typeface="Palatino Linotype" pitchFamily="34" charset="-120"/>
               </a:rPr>
-              <a:t>De ce a crescut numărul tomografiilor de cap la copiii cu lovituri ușoare și ce schimbăm pentru toți copiii?</a:t>
+              <a:t>De ce a crescut numărul examenelor CT ale capului la copiii cu lovituri ușoare și ce schimbăm pentru toți copiii?</a:t>
             </a:r>
             <a:endParaRPr lang="en-US" sz="1600" dirty="0"/>
           </a:p>
@@ -17523,7 +17523,7 @@
                 <a:ea typeface="Palatino Linotype" pitchFamily="34" charset="-122"/>
                 <a:cs typeface="Palatino Linotype" pitchFamily="34" charset="-120"/>
               </a:rPr>
-              <a:t>Calculați: căderile din cartier și cazurile după tomografiile unui an.</a:t>
+              <a:t>Calculați: căderile din cartier și cazurile după examenele CT ale unui an.</a:t>
             </a:r>
             <a:endParaRPr lang="en-US" sz="1700" dirty="0"/>
           </a:p>
@@ -17765,7 +17765,7 @@
                 <a:ea typeface="Palatino Linotype" pitchFamily="34" charset="-122"/>
                 <a:cs typeface="Palatino Linotype" pitchFamily="34" charset="-120"/>
               </a:rPr>
-              <a:t>Tomografiile capului la copii sub 10 ani: un caz suplimentar de leucemie și unul de tumoră cerebrală la 10 000 de examinări (estimare pentru tomografiile din 1985–2002).</a:t>
+              <a:t>Examenele CT ale capului la copii sub 10 ani: un caz suplimentar de leucemie și unul de tumoră cerebrală la 10 000 de examinări (estimare pentru examenele CT din 1985–2002).</a:t>
             </a:r>
             <a:endParaRPr lang="en-US" sz="1400" dirty="0"/>
           </a:p>
@@ -18619,7 +18619,7 @@
                 <a:ea typeface="Palatino Linotype" pitchFamily="34" charset="-122"/>
                 <a:cs typeface="Palatino Linotype" pitchFamily="34" charset="-120"/>
               </a:rPr>
-              <a:t>450 ÷ 650 × 100 = 69,2%. Tomografii: 50 000 ÷ 10 000 × 2 = 10 cazuri în zece ani.</a:t>
+              <a:t>450 ÷ 650 × 100 = 69,2%. Examenele CT: 50 000 ÷ 10 000 × 2 = 10 cazuri în zece ani.</a:t>
             </a:r>
             <a:endParaRPr lang="en-US" sz="1450" dirty="0"/>
           </a:p>
